--- a/gator_xuv590m.pptx
+++ b/gator_xuv590m.pptx
@@ -258,7 +258,7 @@
           <a:lstStyle/>
           <a:p>
             <a:fld id="{97038524-70D1-384B-B10D-56671DEC9691}" type="datetimeFigureOut">
-              <a:t>10/15/22</a:t>
+              <a:t>11/11/22</a:t>
             </a:fld>
             <a:endParaRPr lang="en-US"/>
           </a:p>
@@ -454,7 +454,7 @@
           <a:lstStyle/>
           <a:p>
             <a:fld id="{97038524-70D1-384B-B10D-56671DEC9691}" type="datetimeFigureOut">
-              <a:t>10/15/22</a:t>
+              <a:t>11/11/22</a:t>
             </a:fld>
             <a:endParaRPr lang="en-US"/>
           </a:p>
@@ -660,7 +660,7 @@
           <a:lstStyle/>
           <a:p>
             <a:fld id="{97038524-70D1-384B-B10D-56671DEC9691}" type="datetimeFigureOut">
-              <a:t>10/15/22</a:t>
+              <a:t>11/11/22</a:t>
             </a:fld>
             <a:endParaRPr lang="en-US"/>
           </a:p>
@@ -856,7 +856,7 @@
           <a:lstStyle/>
           <a:p>
             <a:fld id="{97038524-70D1-384B-B10D-56671DEC9691}" type="datetimeFigureOut">
-              <a:t>10/15/22</a:t>
+              <a:t>11/11/22</a:t>
             </a:fld>
             <a:endParaRPr lang="en-US"/>
           </a:p>
@@ -1129,7 +1129,7 @@
           <a:lstStyle/>
           <a:p>
             <a:fld id="{97038524-70D1-384B-B10D-56671DEC9691}" type="datetimeFigureOut">
-              <a:t>10/15/22</a:t>
+              <a:t>11/11/22</a:t>
             </a:fld>
             <a:endParaRPr lang="en-US"/>
           </a:p>
@@ -1392,7 +1392,7 @@
           <a:lstStyle/>
           <a:p>
             <a:fld id="{97038524-70D1-384B-B10D-56671DEC9691}" type="datetimeFigureOut">
-              <a:t>10/15/22</a:t>
+              <a:t>11/11/22</a:t>
             </a:fld>
             <a:endParaRPr lang="en-US"/>
           </a:p>
@@ -1802,7 +1802,7 @@
           <a:lstStyle/>
           <a:p>
             <a:fld id="{97038524-70D1-384B-B10D-56671DEC9691}" type="datetimeFigureOut">
-              <a:t>10/15/22</a:t>
+              <a:t>11/11/22</a:t>
             </a:fld>
             <a:endParaRPr lang="en-US"/>
           </a:p>
@@ -1941,7 +1941,7 @@
           <a:lstStyle/>
           <a:p>
             <a:fld id="{97038524-70D1-384B-B10D-56671DEC9691}" type="datetimeFigureOut">
-              <a:t>10/15/22</a:t>
+              <a:t>11/11/22</a:t>
             </a:fld>
             <a:endParaRPr lang="en-US"/>
           </a:p>
@@ -2052,7 +2052,7 @@
           <a:lstStyle/>
           <a:p>
             <a:fld id="{97038524-70D1-384B-B10D-56671DEC9691}" type="datetimeFigureOut">
-              <a:t>10/15/22</a:t>
+              <a:t>11/11/22</a:t>
             </a:fld>
             <a:endParaRPr lang="en-US"/>
           </a:p>
@@ -2361,7 +2361,7 @@
           <a:lstStyle/>
           <a:p>
             <a:fld id="{97038524-70D1-384B-B10D-56671DEC9691}" type="datetimeFigureOut">
-              <a:t>10/15/22</a:t>
+              <a:t>11/11/22</a:t>
             </a:fld>
             <a:endParaRPr lang="en-US"/>
           </a:p>
@@ -2647,7 +2647,7 @@
           <a:lstStyle/>
           <a:p>
             <a:fld id="{97038524-70D1-384B-B10D-56671DEC9691}" type="datetimeFigureOut">
-              <a:t>10/15/22</a:t>
+              <a:t>11/11/22</a:t>
             </a:fld>
             <a:endParaRPr lang="en-US"/>
           </a:p>
@@ -2886,7 +2886,7 @@
           </a:lstStyle>
           <a:p>
             <a:fld id="{97038524-70D1-384B-B10D-56671DEC9691}" type="datetimeFigureOut">
-              <a:t>10/15/22</a:t>
+              <a:t>11/11/22</a:t>
             </a:fld>
             <a:endParaRPr lang="en-US"/>
           </a:p>
@@ -3471,13 +3471,13 @@
           <a:p>
             <a:r>
               <a:rPr lang="en-US" sz="1400"/>
+              <a:t> .. Ops Kit (OPS = Occupant Protection System) – lights &amp; wires</a:t>
+            </a:r>
+          </a:p>
+          <a:p>
+            <a:r>
+              <a:rPr lang="en-US" sz="1400"/>
               <a:t> .. Bumper (rear)</a:t>
-            </a:r>
-          </a:p>
-          <a:p>
-            <a:r>
-              <a:rPr lang="en-US" sz="1400"/>
-              <a:t> .. Ops Kit (OPS = Occupant Protection System) – lights &amp; wires</a:t>
             </a:r>
           </a:p>
           <a:p>
@@ -3522,7 +3522,7 @@
         </p:blipFill>
         <p:spPr>
           <a:xfrm>
-            <a:off x="6898619" y="1564819"/>
+            <a:off x="6096000" y="445882"/>
             <a:ext cx="3719384" cy="2639292"/>
           </a:xfrm>
           <a:prstGeom prst="rect">
@@ -3690,6 +3690,78 @@
             <a:r>
               <a:rPr lang="en-US" sz="2800" b="1"/>
               <a:t>John Deere Gator UXV590M</a:t>
+            </a:r>
+          </a:p>
+        </p:txBody>
+      </p:sp>
+      <p:sp>
+        <p:nvSpPr>
+          <p:cNvPr id="7" name="TextBox 6">
+            <a:extLst>
+              <a:ext uri="{FF2B5EF4-FFF2-40B4-BE49-F238E27FC236}">
+                <a16:creationId xmlns:a16="http://schemas.microsoft.com/office/drawing/2014/main" id="{F62B8485-5229-2755-87C0-D35FF7E6B46A}"/>
+              </a:ext>
+            </a:extLst>
+          </p:cNvPr>
+          <p:cNvSpPr txBox="1"/>
+          <p:nvPr/>
+        </p:nvSpPr>
+        <p:spPr>
+          <a:xfrm>
+            <a:off x="6523882" y="3787133"/>
+            <a:ext cx="4970399" cy="1600438"/>
+          </a:xfrm>
+          <a:prstGeom prst="rect">
+            <a:avLst/>
+          </a:prstGeom>
+          <a:solidFill>
+            <a:schemeClr val="accent4">
+              <a:lumMod val="20000"/>
+              <a:lumOff val="80000"/>
+            </a:schemeClr>
+          </a:solidFill>
+          <a:ln>
+            <a:solidFill>
+              <a:srgbClr val="FF0000"/>
+            </a:solidFill>
+          </a:ln>
+        </p:spPr>
+        <p:txBody>
+          <a:bodyPr wrap="square" rtlCol="0">
+            <a:spAutoFit/>
+          </a:bodyPr>
+          <a:lstStyle/>
+          <a:p>
+            <a:r>
+              <a:rPr lang="en-US" sz="1400"/>
+              <a:t>Tires:</a:t>
+            </a:r>
+          </a:p>
+          <a:p>
+            <a:r>
+              <a:rPr lang="en-US" sz="1400"/>
+              <a:t>26” Maxxis Bighorn 2.0 extreme terrain radial tires on 14” Yellow Steel Wheels</a:t>
+            </a:r>
+          </a:p>
+          <a:p>
+            <a:endParaRPr lang="en-US" sz="1400"/>
+          </a:p>
+          <a:p>
+            <a:r>
+              <a:rPr lang="en-US" sz="1400"/>
+              <a:t>Pressure ???:</a:t>
+            </a:r>
+          </a:p>
+          <a:p>
+            <a:r>
+              <a:rPr lang="en-US" sz="1400"/>
+              <a:t>Front: 14 PSI</a:t>
+            </a:r>
+          </a:p>
+          <a:p>
+            <a:r>
+              <a:rPr lang="en-US" sz="1400"/>
+              <a:t>Rear: 32PSI</a:t>
             </a:r>
           </a:p>
         </p:txBody>

--- a/gator_xuv590m.pptx
+++ b/gator_xuv590m.pptx
@@ -258,7 +258,7 @@
           <a:lstStyle/>
           <a:p>
             <a:fld id="{97038524-70D1-384B-B10D-56671DEC9691}" type="datetimeFigureOut">
-              <a:t>11/11/22</a:t>
+              <a:t>11/25/22</a:t>
             </a:fld>
             <a:endParaRPr lang="en-US"/>
           </a:p>
@@ -454,7 +454,7 @@
           <a:lstStyle/>
           <a:p>
             <a:fld id="{97038524-70D1-384B-B10D-56671DEC9691}" type="datetimeFigureOut">
-              <a:t>11/11/22</a:t>
+              <a:t>11/25/22</a:t>
             </a:fld>
             <a:endParaRPr lang="en-US"/>
           </a:p>
@@ -660,7 +660,7 @@
           <a:lstStyle/>
           <a:p>
             <a:fld id="{97038524-70D1-384B-B10D-56671DEC9691}" type="datetimeFigureOut">
-              <a:t>11/11/22</a:t>
+              <a:t>11/25/22</a:t>
             </a:fld>
             <a:endParaRPr lang="en-US"/>
           </a:p>
@@ -856,7 +856,7 @@
           <a:lstStyle/>
           <a:p>
             <a:fld id="{97038524-70D1-384B-B10D-56671DEC9691}" type="datetimeFigureOut">
-              <a:t>11/11/22</a:t>
+              <a:t>11/25/22</a:t>
             </a:fld>
             <a:endParaRPr lang="en-US"/>
           </a:p>
@@ -1129,7 +1129,7 @@
           <a:lstStyle/>
           <a:p>
             <a:fld id="{97038524-70D1-384B-B10D-56671DEC9691}" type="datetimeFigureOut">
-              <a:t>11/11/22</a:t>
+              <a:t>11/25/22</a:t>
             </a:fld>
             <a:endParaRPr lang="en-US"/>
           </a:p>
@@ -1392,7 +1392,7 @@
           <a:lstStyle/>
           <a:p>
             <a:fld id="{97038524-70D1-384B-B10D-56671DEC9691}" type="datetimeFigureOut">
-              <a:t>11/11/22</a:t>
+              <a:t>11/25/22</a:t>
             </a:fld>
             <a:endParaRPr lang="en-US"/>
           </a:p>
@@ -1802,7 +1802,7 @@
           <a:lstStyle/>
           <a:p>
             <a:fld id="{97038524-70D1-384B-B10D-56671DEC9691}" type="datetimeFigureOut">
-              <a:t>11/11/22</a:t>
+              <a:t>11/25/22</a:t>
             </a:fld>
             <a:endParaRPr lang="en-US"/>
           </a:p>
@@ -1941,7 +1941,7 @@
           <a:lstStyle/>
           <a:p>
             <a:fld id="{97038524-70D1-384B-B10D-56671DEC9691}" type="datetimeFigureOut">
-              <a:t>11/11/22</a:t>
+              <a:t>11/25/22</a:t>
             </a:fld>
             <a:endParaRPr lang="en-US"/>
           </a:p>
@@ -2052,7 +2052,7 @@
           <a:lstStyle/>
           <a:p>
             <a:fld id="{97038524-70D1-384B-B10D-56671DEC9691}" type="datetimeFigureOut">
-              <a:t>11/11/22</a:t>
+              <a:t>11/25/22</a:t>
             </a:fld>
             <a:endParaRPr lang="en-US"/>
           </a:p>
@@ -2361,7 +2361,7 @@
           <a:lstStyle/>
           <a:p>
             <a:fld id="{97038524-70D1-384B-B10D-56671DEC9691}" type="datetimeFigureOut">
-              <a:t>11/11/22</a:t>
+              <a:t>11/25/22</a:t>
             </a:fld>
             <a:endParaRPr lang="en-US"/>
           </a:p>
@@ -2647,7 +2647,7 @@
           <a:lstStyle/>
           <a:p>
             <a:fld id="{97038524-70D1-384B-B10D-56671DEC9691}" type="datetimeFigureOut">
-              <a:t>11/11/22</a:t>
+              <a:t>11/25/22</a:t>
             </a:fld>
             <a:endParaRPr lang="en-US"/>
           </a:p>
@@ -2886,7 +2886,7 @@
           </a:lstStyle>
           <a:p>
             <a:fld id="{97038524-70D1-384B-B10D-56671DEC9691}" type="datetimeFigureOut">
-              <a:t>11/11/22</a:t>
+              <a:t>11/25/22</a:t>
             </a:fld>
             <a:endParaRPr lang="en-US"/>
           </a:p>
@@ -3733,35 +3733,43 @@
           <a:lstStyle/>
           <a:p>
             <a:r>
-              <a:rPr lang="en-US" sz="1400"/>
+              <a:rPr lang="en-US" sz="1400" dirty="0"/>
               <a:t>Tires:</a:t>
             </a:r>
           </a:p>
           <a:p>
             <a:r>
-              <a:rPr lang="en-US" sz="1400"/>
-              <a:t>26” Maxxis Bighorn 2.0 extreme terrain radial tires on 14” Yellow Steel Wheels</a:t>
-            </a:r>
-          </a:p>
-          <a:p>
-            <a:endParaRPr lang="en-US" sz="1400"/>
-          </a:p>
-          <a:p>
-            <a:r>
-              <a:rPr lang="en-US" sz="1400"/>
-              <a:t>Pressure ???:</a:t>
-            </a:r>
-          </a:p>
-          <a:p>
-            <a:r>
-              <a:rPr lang="en-US" sz="1400"/>
-              <a:t>Front: 14 PSI</a:t>
-            </a:r>
-          </a:p>
-          <a:p>
-            <a:r>
-              <a:rPr lang="en-US" sz="1400"/>
-              <a:t>Rear: 32PSI</a:t>
+              <a:rPr lang="en-US" sz="1400" dirty="0"/>
+              <a:t>26” </a:t>
+            </a:r>
+            <a:r>
+              <a:rPr lang="en-US" sz="1400" dirty="0" err="1"/>
+              <a:t>Maxxis</a:t>
+            </a:r>
+            <a:r>
+              <a:rPr lang="en-US" sz="1400" dirty="0"/>
+              <a:t> Bighorn 2.0 extreme terrain radial tires on 14” Yellow Steel Wheels</a:t>
+            </a:r>
+          </a:p>
+          <a:p>
+            <a:endParaRPr lang="en-US" sz="1400" dirty="0"/>
+          </a:p>
+          <a:p>
+            <a:r>
+              <a:rPr lang="en-US" sz="1400" dirty="0"/>
+              <a:t>Pressure:</a:t>
+            </a:r>
+          </a:p>
+          <a:p>
+            <a:r>
+              <a:rPr lang="en-US" sz="1400" dirty="0"/>
+              <a:t>.. front: 14 PSI</a:t>
+            </a:r>
+          </a:p>
+          <a:p>
+            <a:r>
+              <a:rPr lang="en-US" sz="1400" dirty="0"/>
+              <a:t>.. rear: 32 PSI</a:t>
             </a:r>
           </a:p>
         </p:txBody>
